--- a/project/capstone/paper/slides/TALK_8MIN.pptx
+++ b/project/capstone/paper/slides/TALK_8MIN.pptx
@@ -580,7 +580,7 @@
           <a:lstStyle/>
           <a:p>
             <a:r>
-              <a:t>Safety monitoring wants per-concept detectors — lenses — over families of related behaviours. These concepts aren't independent: manipulation, deception, sycophancy form a graph. The hypothesis we inherited from a collaborating interpretability project: relationship-aware training improves detection, and if two concepts are connected by many independent paths, you can triangulate their boundary even without direct data. Intuitive, testable, and if true, very useful: graphs are cheap, data is not. (1:00)</a:t>
+              <a:t>Safety monitoring wants per-concept detectors — lenses — over families of related behaviours. These concepts aren't independent: manipulation, deception, sycophancy form a graph. The hypothesis we inherited — later peer-replicated on a second model: relationship-aware training improves detection, and if two concepts are connected by many independent paths, you can triangulate their boundary even without direct data. Intuitive, testable, and if true, very useful: graphs are cheap, data is not. (1:00)</a:t>
             </a:r>
           </a:p>
         </p:txBody>
@@ -790,7 +790,7 @@
           <a:lstStyle/>
           <a:p>
             <a:r>
-              <a:t>Our collaborator's diagnosis: the mechanism isn't extra positives, it's hard negatives — train Manipulation's probe with its actual siblings as the negative class. That works: +0.06 F1, and the declared graph beats shuffled placebo graphs at p=0.002 — the curated edges are real confusability structure, not just 'any graph'. Two honest bounds: about a third of the effect is shared vocabulary, and — right column — the effect lives entirely in DIRECT adjacency. Same numbers, two models, two codebases, fully independent runs. (1:15)</a:t>
+              <a:t>The peer replication's diagnosis: the mechanism isn't extra positives, it's hard negatives — train Manipulation's probe with its actual siblings as the negative class. That works: +0.06 F1, and the declared graph beats shuffled placebo graphs at p=0.002 — the curated edges are real confusability structure, not just 'any graph'. Two honest bounds: about a third of the effect is shared vocabulary, and — right column — the effect lives entirely in DIRECT adjacency. Same numbers, two models, two codebases, fully independent runs. (1:15)</a:t>
             </a:r>
           </a:p>
         </p:txBody>
@@ -4868,7 +4868,7 @@
                         </a:defRPr>
                       </a:pPr>
                       <a:r>
-                        <a:t>E4B (independent replication)</a:t>
+                        <a:t>E4B (peer replication)</a:t>
                       </a:r>
                     </a:p>
                   </a:txBody>

--- a/project/capstone/paper/slides/TALK_8MIN.pptx
+++ b/project/capstone/paper/slides/TALK_8MIN.pptx
@@ -866,13 +866,7 @@
           <a:p/>
           <a:p>
             <a:r>
-              <a:t>[NULL FILL: And the obvious rebuttal — 'you just need more data' — is what iteration 4 killed: we scaled to 10x under a locked pre-registration, and the line stays flat. Say aloud only the top-volume mean and CI; per-volume numbers and p-values live on the slide. Within-model, pre-registered, minimum detectable effect reported: the alternate-path prediction is refuted with shown — not asserted — power.]</a:t>
-            </a:r>
-          </a:p>
-          <a:p/>
-          <a:p>
-            <a:r>
-              <a:t>[CONFIRM FILL: And iteration 4 surprised us: at 10x volume the held-out-edge delta rises — numbers — connectivity was power-limited, and the next question is WHICH edges recovered signal.] (1:15)</a:t>
+              <a:t>And the obvious rebuttal — 'you just need more data' — is what iteration 4 killed: we scaled to 10x under a locked pre-registration, and the line stays flat — at the top volume it's +0.005 with a confidence interval spanning zero. Say only that aloud; per-volume numbers and p-values live on the slide. And the power is shown, not asserted: the design could detect 0.014, and the direct effect — three times that size — shows the instrument works. Within-model, pre-registered: the alternate-path prediction is refuted. (1:15)</a:t>
             </a:r>
           </a:p>
         </p:txBody>
@@ -948,7 +942,7 @@
           <a:p/>
           <a:p>
             <a:r>
-              <a:t>[If iteration 4 CONFIRMS instead, close with: '—and iteration 4 showed this model undersold independence: some alternate paths do carry signal at volume. Finding which ones is the next sub-analysis.'] (0:35)</a:t>
+              <a:t>Bonus beat if time allows: the direct effect itself shrinks as data grows — +0.061 at 7/context to +0.040 at 70 — so smart negatives matter most exactly when data is scarce, which is the realistic regime for long-tail safety concepts. (0:35)</a:t>
             </a:r>
           </a:p>
         </p:txBody>
@@ -5273,7 +5267,7 @@
       </p:sp>
       <p:pic>
         <p:nvPicPr>
-          <p:cNvPr id="4" name="Picture 3" descr="fig3_volume_curve.png"/>
+          <p:cNvPr id="4" name="Picture 3" descr="fig5_sweep_with_e4b_overlay.png"/>
           <p:cNvPicPr>
             <a:picLocks noChangeAspect="1"/>
           </p:cNvPicPr>
@@ -5287,8 +5281,8 @@
         </p:blipFill>
         <p:spPr>
           <a:xfrm>
-            <a:off x="731520" y="1554480"/>
-            <a:ext cx="7498079" cy="4590386"/>
+            <a:off x="731520" y="1234440"/>
+            <a:ext cx="7863840" cy="4810820"/>
           </a:xfrm>
           <a:prstGeom prst="rect">
             <a:avLst/>
@@ -5303,8 +5297,8 @@
         </p:nvSpPr>
         <p:spPr>
           <a:xfrm>
-            <a:off x="731520" y="1188720"/>
-            <a:ext cx="7498079" cy="365760"/>
+            <a:off x="8686800" y="1554480"/>
+            <a:ext cx="3200400" cy="4754880"/>
           </a:xfrm>
           <a:prstGeom prst="rect">
             <a:avLst/>
@@ -5312,41 +5306,6 @@
           <a:noFill/>
         </p:spPr>
         <p:txBody>
-          <a:bodyPr wrap="none">
-            <a:spAutoFit/>
-          </a:bodyPr>
-          <a:lstStyle/>
-          <a:p>
-            <a:pPr>
-              <a:defRPr sz="1400" b="1">
-                <a:solidFill>
-                  <a:srgbClr val="E67E22"/>
-                </a:solidFill>
-              </a:defRPr>
-            </a:pPr>
-            <a:r>
-              <a:t>PLACEHOLDER — final figure (fig5, volumes to 70/context) lands after the iteration-4 sweep</a:t>
-            </a:r>
-          </a:p>
-        </p:txBody>
-      </p:sp>
-      <p:sp>
-        <p:nvSpPr>
-          <p:cNvPr id="6" name="TextBox 5"/>
-          <p:cNvSpPr txBox="1"/>
-          <p:nvPr/>
-        </p:nvSpPr>
-        <p:spPr>
-          <a:xfrm>
-            <a:off x="8686800" y="1554480"/>
-            <a:ext cx="3200400" cy="4572000"/>
-          </a:xfrm>
-          <a:prstGeom prst="rect">
-            <a:avLst/>
-          </a:prstGeom>
-          <a:noFill/>
-        </p:spPr>
-        <p:txBody>
           <a:bodyPr wrap="square">
             <a:spAutoFit/>
           </a:bodyPr>
@@ -5386,14 +5345,14 @@
               <a:spcAft>
                 <a:spcPts val="1000"/>
               </a:spcAft>
-              <a:defRPr sz="1800" b="1" i="0">
+              <a:defRPr sz="1700" b="1" i="0">
                 <a:solidFill>
                   <a:srgbClr val="C44E52"/>
                 </a:solidFill>
               </a:defRPr>
             </a:pPr>
             <a:r>
-              <a:t>They don't: ≈ +0.01</a:t>
+              <a:t>They don't — at any volume:</a:t>
             </a:r>
           </a:p>
           <a:p>
@@ -5403,12 +5362,42 @@
               </a:spcAft>
               <a:defRPr sz="1500" b="1" i="0">
                 <a:solidFill>
-                  <a:srgbClr val="E67E22"/>
+                  <a:srgbClr val="1A1A2E"/>
                 </a:solidFill>
               </a:defRPr>
             </a:pPr>
             <a:r>
-              <a:t>[ITER-4 VERDICT HERE after the sweep]</a:t>
+              <a:t>10× sweep: top volume +0.005, 95% CI [−0.005, +0.014] — spans zero</a:t>
+            </a:r>
+          </a:p>
+          <a:p>
+            <a:pPr>
+              <a:spcAft>
+                <a:spcPts val="1000"/>
+              </a:spcAft>
+              <a:defRPr sz="1500" b="0" i="0">
+                <a:solidFill>
+                  <a:srgbClr val="1A1A2E"/>
+                </a:solidFill>
+              </a:defRPr>
+            </a:pPr>
+            <a:r>
+              <a:t>Power shown: could detect 0.014; the direct effect is 3× that</a:t>
+            </a:r>
+          </a:p>
+          <a:p>
+            <a:pPr>
+              <a:spcAft>
+                <a:spcPts val="1000"/>
+              </a:spcAft>
+              <a:defRPr sz="1700" b="1" i="0">
+                <a:solidFill>
+                  <a:srgbClr val="C44E52"/>
+                </a:solidFill>
+              </a:defRPr>
+            </a:pPr>
+            <a:r>
+              <a:t>VERDICT: pre-registered NULL</a:t>
             </a:r>
           </a:p>
           <a:p>
@@ -5423,7 +5412,7 @@
               </a:defRPr>
             </a:pPr>
             <a:r>
-              <a:t>E4B points = independent corroboration; headline trend is within-model (Gemma-2-9B)</a:t>
+              <a:t>E4B points = peer-replication corroboration; headline trend is within-model (Gemma-2-9B)</a:t>
             </a:r>
           </a:p>
         </p:txBody>
